--- a/tests/fixtures/quarterly-report.pptx
+++ b/tests/fixtures/quarterly-report.pptx
@@ -3709,7 +3709,7 @@
         <a:graphic>
           <a:graphicData uri="http://schemas.openxmlformats.org/drawingml/2006/table">
             <a:tbl>
-              <a:tblPr firstRow="1" bandRow="1" rtl="1">
+              <a:tblPr firstRow="1" bandRow="1">
                 <a:tableStyleId>{5C22544A-7EE6-4342-B048-85BDC9FD1C3A}</a:tableStyleId>
               </a:tblPr>
               <a:tblGrid>
